--- a/Project_Presentation.pptx
+++ b/Project_Presentation.pptx
@@ -265,10 +265,47 @@
       <p15:sldGuideLst xmlns:p15="http://schemas.microsoft.com/office/powerpoint/2012/main"/>
     </p:ext>
     <p:ext uri="GoogleSlidesCustomDataVersion2">
-      <go:slidesCustomData xmlns:go="http://customooxmlschemas.google.com/" xmlns:ahyp="http://schemas.microsoft.com/office/drawing/2018/hyperlinkcolor" xmlns:p15="http://schemas.microsoft.com/office/powerpoint/2012/main" xmlns:p14="http://schemas.microsoft.com/office/powerpoint/2010/main" xmlns:com="http://schemas.openxmlformats.org/drawingml/2006/compatibility" xmlns:pvml="urn:schemas-microsoft-com:office:powerpoint" xmlns:v="urn:schemas-microsoft-com:vml" xmlns:o="urn:schemas-microsoft-com:office:office" xmlns:dgm="http://schemas.openxmlformats.org/drawingml/2006/diagram" xmlns:c="http://schemas.openxmlformats.org/drawingml/2006/chart" xmlns:mv="urn:schemas-microsoft-com:mac:vml" xmlns:mc="http://schemas.openxmlformats.org/markup-compatibility/2006" xmlns="" r:id="rId27" roundtripDataSignature="AMtx7mjt3491jQ7aCoyIz2WXeHKroE7tpQ=="/>
+      <go:slidesCustomData xmlns="" xmlns:mc="http://schemas.openxmlformats.org/markup-compatibility/2006" xmlns:mv="urn:schemas-microsoft-com:mac:vml" xmlns:c="http://schemas.openxmlformats.org/drawingml/2006/chart" xmlns:dgm="http://schemas.openxmlformats.org/drawingml/2006/diagram" xmlns:o="urn:schemas-microsoft-com:office:office" xmlns:v="urn:schemas-microsoft-com:vml" xmlns:pvml="urn:schemas-microsoft-com:office:powerpoint" xmlns:com="http://schemas.openxmlformats.org/drawingml/2006/compatibility" xmlns:p14="http://schemas.microsoft.com/office/powerpoint/2010/main" xmlns:p15="http://schemas.microsoft.com/office/powerpoint/2012/main" xmlns:ahyp="http://schemas.microsoft.com/office/drawing/2018/hyperlinkcolor" xmlns:go="http://customooxmlschemas.google.com/" r:id="rId27" roundtripDataSignature="AMtx7mjt3491jQ7aCoyIz2WXeHKroE7tpQ=="/>
     </p:ext>
   </p:extLst>
 </p:presentation>
+</file>
+
+<file path=ppt/revisionInfo.xml><?xml version="1.0" encoding="utf-8"?>
+<p1510:revInfo xmlns:a="http://schemas.openxmlformats.org/drawingml/2006/main" xmlns:r="http://schemas.openxmlformats.org/officeDocument/2006/relationships" xmlns:p1510="http://schemas.microsoft.com/office/powerpoint/2015/10/main">
+  <p1510:revLst>
+    <p1510:client id="{B46B545C-A46A-4364-B577-10165419BA17}" v="3" dt="2026-09-08T17:52:43.806"/>
+  </p1510:revLst>
+</p1510:revInfo>
+</file>
+
+<file path=ppt/changesInfos/changesInfo1.xml><?xml version="1.0" encoding="utf-8"?>
+<pc:chgInfo xmlns:a="http://schemas.openxmlformats.org/drawingml/2006/main" xmlns:r="http://schemas.openxmlformats.org/officeDocument/2006/relationships" xmlns:ac="http://schemas.microsoft.com/office/drawing/2013/main/command" xmlns:pc="http://schemas.microsoft.com/office/powerpoint/2013/main/command">
+  <pc:docChgLst>
+    <pc:chgData name="Naveen Sharma" userId="ace8e01f53935731" providerId="LiveId" clId="{7CF565F9-B6F0-46A3-9B04-507F30EE438D}"/>
+    <pc:docChg chg="modSld">
+      <pc:chgData name="Naveen Sharma" userId="ace8e01f53935731" providerId="LiveId" clId="{7CF565F9-B6F0-46A3-9B04-507F30EE438D}" dt="2026-09-08T17:51:34.324" v="2" actId="20578"/>
+      <pc:docMkLst>
+        <pc:docMk/>
+      </pc:docMkLst>
+      <pc:sldChg chg="modSp mod">
+        <pc:chgData name="Naveen Sharma" userId="ace8e01f53935731" providerId="LiveId" clId="{7CF565F9-B6F0-46A3-9B04-507F30EE438D}" dt="2026-09-08T17:51:34.324" v="2" actId="20578"/>
+        <pc:sldMkLst>
+          <pc:docMk/>
+          <pc:sldMk cId="4040412275" sldId="305"/>
+        </pc:sldMkLst>
+        <pc:spChg chg="mod">
+          <ac:chgData name="Naveen Sharma" userId="ace8e01f53935731" providerId="LiveId" clId="{7CF565F9-B6F0-46A3-9B04-507F30EE438D}" dt="2026-09-08T17:51:34.324" v="2" actId="20578"/>
+          <ac:spMkLst>
+            <pc:docMk/>
+            <pc:sldMk cId="4040412275" sldId="305"/>
+            <ac:spMk id="279" creationId="{3711AF54-94A6-B837-31EF-9A8C4ECB9AF6}"/>
+          </ac:spMkLst>
+        </pc:spChg>
+      </pc:sldChg>
+    </pc:docChg>
+  </pc:docChgLst>
+</pc:chgInfo>
 </file>
 
 <file path=ppt/notesMasters/notesMaster1.xml><?xml version="1.0" encoding="utf-8"?>
@@ -14503,22 +14540,14 @@
             </a:r>
           </a:p>
           <a:p>
-            <a:pPr marL="0" marR="0" lvl="0" indent="0" algn="l" rtl="0">
+            <a:pPr>
               <a:lnSpc>
                 <a:spcPct val="162162"/>
               </a:lnSpc>
-              <a:spcBef>
-                <a:spcPts val="0"/>
-              </a:spcBef>
-              <a:spcAft>
-                <a:spcPts val="0"/>
-              </a:spcAft>
               <a:buClr>
                 <a:srgbClr val="2B3541"/>
               </a:buClr>
               <a:buSzPts val="1850"/>
-              <a:buFont typeface="Times New Roman"/>
-              <a:buNone/>
             </a:pPr>
             <a:r>
               <a:rPr lang="en-US" sz="1850" dirty="0">
@@ -14556,6 +14585,28 @@
               </a:rPr>
               <a:t> URL –</a:t>
             </a:r>
+            <a:r>
+              <a:rPr lang="en-US" sz="1850" dirty="0">
+                <a:solidFill>
+                  <a:srgbClr val="2B3541"/>
+                </a:solidFill>
+                <a:latin typeface="Times New Roman"/>
+                <a:ea typeface="Times New Roman"/>
+                <a:cs typeface="Times New Roman"/>
+                <a:sym typeface="Times New Roman"/>
+                <a:hlinkClick r:id="rId3"/>
+              </a:rPr>
+              <a:t>https://github.com/naveencoding75/nutrition-agent</a:t>
+            </a:r>
+            <a:endParaRPr lang="en-US" sz="1850" dirty="0">
+              <a:solidFill>
+                <a:srgbClr val="2B3541"/>
+              </a:solidFill>
+              <a:latin typeface="Times New Roman"/>
+              <a:ea typeface="Times New Roman"/>
+              <a:cs typeface="Times New Roman"/>
+              <a:sym typeface="Times New Roman"/>
+            </a:endParaRPr>
           </a:p>
           <a:p>
             <a:pPr lvl="0">

--- a/Project_Presentation.pptx
+++ b/Project_Presentation.pptx
@@ -265,7 +265,7 @@
       <p15:sldGuideLst xmlns:p15="http://schemas.microsoft.com/office/powerpoint/2012/main"/>
     </p:ext>
     <p:ext uri="GoogleSlidesCustomDataVersion2">
-      <go:slidesCustomData xmlns="" xmlns:mc="http://schemas.openxmlformats.org/markup-compatibility/2006" xmlns:mv="urn:schemas-microsoft-com:mac:vml" xmlns:c="http://schemas.openxmlformats.org/drawingml/2006/chart" xmlns:dgm="http://schemas.openxmlformats.org/drawingml/2006/diagram" xmlns:o="urn:schemas-microsoft-com:office:office" xmlns:v="urn:schemas-microsoft-com:vml" xmlns:pvml="urn:schemas-microsoft-com:office:powerpoint" xmlns:com="http://schemas.openxmlformats.org/drawingml/2006/compatibility" xmlns:p14="http://schemas.microsoft.com/office/powerpoint/2010/main" xmlns:p15="http://schemas.microsoft.com/office/powerpoint/2012/main" xmlns:ahyp="http://schemas.microsoft.com/office/drawing/2018/hyperlinkcolor" xmlns:go="http://customooxmlschemas.google.com/" r:id="rId27" roundtripDataSignature="AMtx7mjt3491jQ7aCoyIz2WXeHKroE7tpQ=="/>
+      <go:slidesCustomData xmlns:go="http://customooxmlschemas.google.com/" xmlns:ahyp="http://schemas.microsoft.com/office/drawing/2018/hyperlinkcolor" xmlns:p15="http://schemas.microsoft.com/office/powerpoint/2012/main" xmlns:p14="http://schemas.microsoft.com/office/powerpoint/2010/main" xmlns:com="http://schemas.openxmlformats.org/drawingml/2006/compatibility" xmlns:pvml="urn:schemas-microsoft-com:office:powerpoint" xmlns:v="urn:schemas-microsoft-com:vml" xmlns:o="urn:schemas-microsoft-com:office:office" xmlns:dgm="http://schemas.openxmlformats.org/drawingml/2006/diagram" xmlns:c="http://schemas.openxmlformats.org/drawingml/2006/chart" xmlns:mv="urn:schemas-microsoft-com:mac:vml" xmlns:mc="http://schemas.openxmlformats.org/markup-compatibility/2006" xmlns="" r:id="rId27" roundtripDataSignature="AMtx7mjt3491jQ7aCoyIz2WXeHKroE7tpQ=="/>
     </p:ext>
   </p:extLst>
 </p:presentation>
@@ -274,7 +274,7 @@
 <file path=ppt/revisionInfo.xml><?xml version="1.0" encoding="utf-8"?>
 <p1510:revInfo xmlns:a="http://schemas.openxmlformats.org/drawingml/2006/main" xmlns:r="http://schemas.openxmlformats.org/officeDocument/2006/relationships" xmlns:p1510="http://schemas.microsoft.com/office/powerpoint/2015/10/main">
   <p1510:revLst>
-    <p1510:client id="{B46B545C-A46A-4364-B577-10165419BA17}" v="3" dt="2026-09-08T17:52:43.806"/>
+    <p1510:client id="{B46B545C-A46A-4364-B577-10165419BA17}" v="4" dt="2026-09-08T18:04:38.299"/>
   </p1510:revLst>
 </p1510:revInfo>
 </file>
@@ -283,23 +283,208 @@
 <pc:chgInfo xmlns:a="http://schemas.openxmlformats.org/drawingml/2006/main" xmlns:r="http://schemas.openxmlformats.org/officeDocument/2006/relationships" xmlns:ac="http://schemas.microsoft.com/office/drawing/2013/main/command" xmlns:pc="http://schemas.microsoft.com/office/powerpoint/2013/main/command">
   <pc:docChgLst>
     <pc:chgData name="Naveen Sharma" userId="ace8e01f53935731" providerId="LiveId" clId="{7CF565F9-B6F0-46A3-9B04-507F30EE438D}"/>
-    <pc:docChg chg="modSld">
-      <pc:chgData name="Naveen Sharma" userId="ace8e01f53935731" providerId="LiveId" clId="{7CF565F9-B6F0-46A3-9B04-507F30EE438D}" dt="2026-09-08T17:51:34.324" v="2" actId="20578"/>
+    <pc:docChg chg="custSel modSld">
+      <pc:chgData name="Naveen Sharma" userId="ace8e01f53935731" providerId="LiveId" clId="{7CF565F9-B6F0-46A3-9B04-507F30EE438D}" dt="2026-09-08T18:09:25.346" v="43" actId="1076"/>
       <pc:docMkLst>
         <pc:docMk/>
       </pc:docMkLst>
-      <pc:sldChg chg="modSp mod">
-        <pc:chgData name="Naveen Sharma" userId="ace8e01f53935731" providerId="LiveId" clId="{7CF565F9-B6F0-46A3-9B04-507F30EE438D}" dt="2026-09-08T17:51:34.324" v="2" actId="20578"/>
+      <pc:sldChg chg="addSp delSp modSp mod">
+        <pc:chgData name="Naveen Sharma" userId="ace8e01f53935731" providerId="LiveId" clId="{7CF565F9-B6F0-46A3-9B04-507F30EE438D}" dt="2026-09-08T18:04:39.130" v="11"/>
+        <pc:sldMkLst>
+          <pc:docMk/>
+          <pc:sldMk cId="952317876" sldId="291"/>
+        </pc:sldMkLst>
+        <pc:spChg chg="add del mod">
+          <ac:chgData name="Naveen Sharma" userId="ace8e01f53935731" providerId="LiveId" clId="{7CF565F9-B6F0-46A3-9B04-507F30EE438D}" dt="2026-09-08T18:04:39.130" v="11"/>
+          <ac:spMkLst>
+            <pc:docMk/>
+            <pc:sldMk cId="952317876" sldId="291"/>
+            <ac:spMk id="2" creationId="{3675EA00-B8B5-F82C-05AF-41BAF4942312}"/>
+          </ac:spMkLst>
+        </pc:spChg>
+        <pc:spChg chg="del mod">
+          <ac:chgData name="Naveen Sharma" userId="ace8e01f53935731" providerId="LiveId" clId="{7CF565F9-B6F0-46A3-9B04-507F30EE438D}" dt="2026-09-08T18:04:35.731" v="8"/>
+          <ac:spMkLst>
+            <pc:docMk/>
+            <pc:sldMk cId="952317876" sldId="291"/>
+            <ac:spMk id="3" creationId="{B0B023FA-CFEB-ACE9-8425-7E72E307CDC5}"/>
+          </ac:spMkLst>
+        </pc:spChg>
+      </pc:sldChg>
+      <pc:sldChg chg="delSp modSp mod">
+        <pc:chgData name="Naveen Sharma" userId="ace8e01f53935731" providerId="LiveId" clId="{7CF565F9-B6F0-46A3-9B04-507F30EE438D}" dt="2026-09-08T18:07:31.816" v="21"/>
+        <pc:sldMkLst>
+          <pc:docMk/>
+          <pc:sldMk cId="1429961814" sldId="301"/>
+        </pc:sldMkLst>
+        <pc:spChg chg="del mod">
+          <ac:chgData name="Naveen Sharma" userId="ace8e01f53935731" providerId="LiveId" clId="{7CF565F9-B6F0-46A3-9B04-507F30EE438D}" dt="2026-09-08T18:07:31.816" v="21"/>
+          <ac:spMkLst>
+            <pc:docMk/>
+            <pc:sldMk cId="1429961814" sldId="301"/>
+            <ac:spMk id="2" creationId="{CCA977A3-5FA0-8FF5-E1D1-86C9ED676512}"/>
+          </ac:spMkLst>
+        </pc:spChg>
+        <pc:picChg chg="mod">
+          <ac:chgData name="Naveen Sharma" userId="ace8e01f53935731" providerId="LiveId" clId="{7CF565F9-B6F0-46A3-9B04-507F30EE438D}" dt="2026-09-08T18:07:30.066" v="19" actId="1076"/>
+          <ac:picMkLst>
+            <pc:docMk/>
+            <pc:sldMk cId="1429961814" sldId="301"/>
+            <ac:picMk id="5" creationId="{C144A704-5FCC-7CFB-C6C4-8BF5A0880852}"/>
+          </ac:picMkLst>
+        </pc:picChg>
+      </pc:sldChg>
+      <pc:sldChg chg="delSp modSp mod">
+        <pc:chgData name="Naveen Sharma" userId="ace8e01f53935731" providerId="LiveId" clId="{7CF565F9-B6F0-46A3-9B04-507F30EE438D}" dt="2026-09-08T18:07:42.510" v="26"/>
+        <pc:sldMkLst>
+          <pc:docMk/>
+          <pc:sldMk cId="3585092305" sldId="302"/>
+        </pc:sldMkLst>
+        <pc:spChg chg="del mod">
+          <ac:chgData name="Naveen Sharma" userId="ace8e01f53935731" providerId="LiveId" clId="{7CF565F9-B6F0-46A3-9B04-507F30EE438D}" dt="2026-09-08T18:07:42.510" v="26"/>
+          <ac:spMkLst>
+            <pc:docMk/>
+            <pc:sldMk cId="3585092305" sldId="302"/>
+            <ac:spMk id="2" creationId="{9692D13D-6B69-03D8-BA22-587B943A2572}"/>
+          </ac:spMkLst>
+        </pc:spChg>
+        <pc:picChg chg="mod">
+          <ac:chgData name="Naveen Sharma" userId="ace8e01f53935731" providerId="LiveId" clId="{7CF565F9-B6F0-46A3-9B04-507F30EE438D}" dt="2026-09-08T18:07:40.250" v="24" actId="1076"/>
+          <ac:picMkLst>
+            <pc:docMk/>
+            <pc:sldMk cId="3585092305" sldId="302"/>
+            <ac:picMk id="7" creationId="{66923A92-B6B2-7923-5A91-9F9D1656F6FD}"/>
+          </ac:picMkLst>
+        </pc:picChg>
+      </pc:sldChg>
+      <pc:sldChg chg="delSp modSp mod">
+        <pc:chgData name="Naveen Sharma" userId="ace8e01f53935731" providerId="LiveId" clId="{7CF565F9-B6F0-46A3-9B04-507F30EE438D}" dt="2026-09-08T18:07:49.482" v="32"/>
+        <pc:sldMkLst>
+          <pc:docMk/>
+          <pc:sldMk cId="2601907186" sldId="303"/>
+        </pc:sldMkLst>
+        <pc:spChg chg="del mod">
+          <ac:chgData name="Naveen Sharma" userId="ace8e01f53935731" providerId="LiveId" clId="{7CF565F9-B6F0-46A3-9B04-507F30EE438D}" dt="2026-09-08T18:07:49.482" v="32"/>
+          <ac:spMkLst>
+            <pc:docMk/>
+            <pc:sldMk cId="2601907186" sldId="303"/>
+            <ac:spMk id="2" creationId="{EB55001C-8880-8B09-8704-29D3F62E7A03}"/>
+          </ac:spMkLst>
+        </pc:spChg>
+        <pc:picChg chg="mod">
+          <ac:chgData name="Naveen Sharma" userId="ace8e01f53935731" providerId="LiveId" clId="{7CF565F9-B6F0-46A3-9B04-507F30EE438D}" dt="2026-09-08T18:07:48.458" v="30" actId="1076"/>
+          <ac:picMkLst>
+            <pc:docMk/>
+            <pc:sldMk cId="2601907186" sldId="303"/>
+            <ac:picMk id="5" creationId="{B4700D4A-3251-AA5C-8FF3-03932D7C7C0C}"/>
+          </ac:picMkLst>
+        </pc:picChg>
+      </pc:sldChg>
+      <pc:sldChg chg="delSp modSp mod">
+        <pc:chgData name="Naveen Sharma" userId="ace8e01f53935731" providerId="LiveId" clId="{7CF565F9-B6F0-46A3-9B04-507F30EE438D}" dt="2026-09-08T18:08:11.644" v="35" actId="478"/>
         <pc:sldMkLst>
           <pc:docMk/>
           <pc:sldMk cId="4040412275" sldId="305"/>
         </pc:sldMkLst>
         <pc:spChg chg="mod">
-          <ac:chgData name="Naveen Sharma" userId="ace8e01f53935731" providerId="LiveId" clId="{7CF565F9-B6F0-46A3-9B04-507F30EE438D}" dt="2026-09-08T17:51:34.324" v="2" actId="20578"/>
+          <ac:chgData name="Naveen Sharma" userId="ace8e01f53935731" providerId="LiveId" clId="{7CF565F9-B6F0-46A3-9B04-507F30EE438D}" dt="2026-09-08T18:02:42.045" v="5" actId="20577"/>
           <ac:spMkLst>
             <pc:docMk/>
             <pc:sldMk cId="4040412275" sldId="305"/>
             <ac:spMk id="279" creationId="{3711AF54-94A6-B837-31EF-9A8C4ECB9AF6}"/>
+          </ac:spMkLst>
+        </pc:spChg>
+        <pc:spChg chg="del">
+          <ac:chgData name="Naveen Sharma" userId="ace8e01f53935731" providerId="LiveId" clId="{7CF565F9-B6F0-46A3-9B04-507F30EE438D}" dt="2026-09-08T18:08:11.644" v="35" actId="478"/>
+          <ac:spMkLst>
+            <pc:docMk/>
+            <pc:sldMk cId="4040412275" sldId="305"/>
+            <ac:spMk id="280" creationId="{E228982D-BF81-530A-CBA1-E897A3CA8EF7}"/>
+          </ac:spMkLst>
+        </pc:spChg>
+        <pc:spChg chg="del">
+          <ac:chgData name="Naveen Sharma" userId="ace8e01f53935731" providerId="LiveId" clId="{7CF565F9-B6F0-46A3-9B04-507F30EE438D}" dt="2026-09-08T18:08:09.468" v="34" actId="478"/>
+          <ac:spMkLst>
+            <pc:docMk/>
+            <pc:sldMk cId="4040412275" sldId="305"/>
+            <ac:spMk id="281" creationId="{7BC356B8-92F8-3187-D065-667AACF68E72}"/>
+          </ac:spMkLst>
+        </pc:spChg>
+        <pc:spChg chg="del">
+          <ac:chgData name="Naveen Sharma" userId="ace8e01f53935731" providerId="LiveId" clId="{7CF565F9-B6F0-46A3-9B04-507F30EE438D}" dt="2026-09-08T18:08:06.670" v="33" actId="478"/>
+          <ac:spMkLst>
+            <pc:docMk/>
+            <pc:sldMk cId="4040412275" sldId="305"/>
+            <ac:spMk id="282" creationId="{1558A011-60D6-B010-6117-1B9F7C786B2B}"/>
+          </ac:spMkLst>
+        </pc:spChg>
+      </pc:sldChg>
+      <pc:sldChg chg="modSp mod">
+        <pc:chgData name="Naveen Sharma" userId="ace8e01f53935731" providerId="LiveId" clId="{7CF565F9-B6F0-46A3-9B04-507F30EE438D}" dt="2026-09-08T18:09:25.346" v="43" actId="1076"/>
+        <pc:sldMkLst>
+          <pc:docMk/>
+          <pc:sldMk cId="740028465" sldId="306"/>
+        </pc:sldMkLst>
+        <pc:spChg chg="mod">
+          <ac:chgData name="Naveen Sharma" userId="ace8e01f53935731" providerId="LiveId" clId="{7CF565F9-B6F0-46A3-9B04-507F30EE438D}" dt="2026-09-08T18:09:25.346" v="43" actId="1076"/>
+          <ac:spMkLst>
+            <pc:docMk/>
+            <pc:sldMk cId="740028465" sldId="306"/>
+            <ac:spMk id="279" creationId="{EAFA16CB-0A72-5AC5-69A0-ABF4A752B43F}"/>
+          </ac:spMkLst>
+        </pc:spChg>
+        <pc:spChg chg="mod">
+          <ac:chgData name="Naveen Sharma" userId="ace8e01f53935731" providerId="LiveId" clId="{7CF565F9-B6F0-46A3-9B04-507F30EE438D}" dt="2026-09-08T18:08:51.346" v="36" actId="20577"/>
+          <ac:spMkLst>
+            <pc:docMk/>
+            <pc:sldMk cId="740028465" sldId="306"/>
+            <ac:spMk id="280" creationId="{B888011B-E4AC-77DB-4A60-BE2C891C49F5}"/>
+          </ac:spMkLst>
+        </pc:spChg>
+        <pc:spChg chg="mod">
+          <ac:chgData name="Naveen Sharma" userId="ace8e01f53935731" providerId="LiveId" clId="{7CF565F9-B6F0-46A3-9B04-507F30EE438D}" dt="2026-09-08T18:09:21.673" v="42" actId="1076"/>
+          <ac:spMkLst>
+            <pc:docMk/>
+            <pc:sldMk cId="740028465" sldId="306"/>
+            <ac:spMk id="281" creationId="{91F05971-9256-10B5-6575-4E7C679C6DAA}"/>
+          </ac:spMkLst>
+        </pc:spChg>
+        <pc:spChg chg="mod">
+          <ac:chgData name="Naveen Sharma" userId="ace8e01f53935731" providerId="LiveId" clId="{7CF565F9-B6F0-46A3-9B04-507F30EE438D}" dt="2026-09-08T18:09:04.839" v="39" actId="20577"/>
+          <ac:spMkLst>
+            <pc:docMk/>
+            <pc:sldMk cId="740028465" sldId="306"/>
+            <ac:spMk id="282" creationId="{F1C3EBC2-438F-C150-9ABF-F14321C2CC5C}"/>
+          </ac:spMkLst>
+        </pc:spChg>
+      </pc:sldChg>
+      <pc:sldChg chg="modSp mod">
+        <pc:chgData name="Naveen Sharma" userId="ace8e01f53935731" providerId="LiveId" clId="{7CF565F9-B6F0-46A3-9B04-507F30EE438D}" dt="2026-09-08T18:05:30.528" v="14" actId="20577"/>
+        <pc:sldMkLst>
+          <pc:docMk/>
+          <pc:sldMk cId="2833482715" sldId="307"/>
+        </pc:sldMkLst>
+        <pc:spChg chg="mod">
+          <ac:chgData name="Naveen Sharma" userId="ace8e01f53935731" providerId="LiveId" clId="{7CF565F9-B6F0-46A3-9B04-507F30EE438D}" dt="2026-09-08T18:05:30.528" v="14" actId="20577"/>
+          <ac:spMkLst>
+            <pc:docMk/>
+            <pc:sldMk cId="2833482715" sldId="307"/>
+            <ac:spMk id="3" creationId="{4837D5EE-379B-FDC5-0854-8AC81D31FADF}"/>
+          </ac:spMkLst>
+        </pc:spChg>
+      </pc:sldChg>
+      <pc:sldChg chg="modSp mod">
+        <pc:chgData name="Naveen Sharma" userId="ace8e01f53935731" providerId="LiveId" clId="{7CF565F9-B6F0-46A3-9B04-507F30EE438D}" dt="2026-09-08T18:05:37.556" v="15" actId="20577"/>
+        <pc:sldMkLst>
+          <pc:docMk/>
+          <pc:sldMk cId="4175177701" sldId="308"/>
+        </pc:sldMkLst>
+        <pc:spChg chg="mod">
+          <ac:chgData name="Naveen Sharma" userId="ace8e01f53935731" providerId="LiveId" clId="{7CF565F9-B6F0-46A3-9B04-507F30EE438D}" dt="2026-09-08T18:05:37.556" v="15" actId="20577"/>
+          <ac:spMkLst>
+            <pc:docMk/>
+            <pc:sldMk cId="4175177701" sldId="308"/>
+            <ac:spMk id="6" creationId="{C0D36B1A-26C2-CD55-1032-4CB5E4EDF305}"/>
           </ac:spMkLst>
         </pc:spChg>
       </pc:sldChg>
@@ -13037,12 +13222,12 @@
               <a:buSzPts val="3500"/>
             </a:pPr>
             <a:r>
-              <a:rPr lang="en-US" sz="2400" b="1">
+              <a:rPr lang="en-US" sz="2400" b="1" dirty="0">
                 <a:sym typeface="Times New Roman"/>
               </a:rPr>
               <a:t> Project Output Screenshot</a:t>
             </a:r>
-            <a:endParaRPr sz="2400" b="1">
+            <a:endParaRPr sz="2400" b="1" dirty="0">
               <a:sym typeface="Times New Roman"/>
             </a:endParaRPr>
           </a:p>
@@ -13264,60 +13449,6 @@
           </a:p>
         </p:txBody>
       </p:sp>
-      <p:sp>
-        <p:nvSpPr>
-          <p:cNvPr id="2" name="TextBox 1">
-            <a:extLst>
-              <a:ext uri="{FF2B5EF4-FFF2-40B4-BE49-F238E27FC236}">
-                <a16:creationId xmlns:a16="http://schemas.microsoft.com/office/drawing/2014/main" id="{CCA977A3-5FA0-8FF5-E1D1-86C9ED676512}"/>
-              </a:ext>
-            </a:extLst>
-          </p:cNvPr>
-          <p:cNvSpPr txBox="1"/>
-          <p:nvPr/>
-        </p:nvSpPr>
-        <p:spPr>
-          <a:xfrm>
-            <a:off x="1335024" y="1865376"/>
-            <a:ext cx="6833922" cy="707886"/>
-          </a:xfrm>
-          <a:prstGeom prst="rect">
-            <a:avLst/>
-          </a:prstGeom>
-          <a:noFill/>
-        </p:spPr>
-        <p:txBody>
-          <a:bodyPr wrap="none" rtlCol="0">
-            <a:spAutoFit/>
-          </a:bodyPr>
-          <a:lstStyle/>
-          <a:p>
-            <a:r>
-              <a:rPr lang="en-US" sz="2000">
-                <a:solidFill>
-                  <a:srgbClr val="FF0000"/>
-                </a:solidFill>
-              </a:rPr>
-              <a:t>Please put IBM Bob output screenshots with 2-3 prompts. </a:t>
-            </a:r>
-          </a:p>
-          <a:p>
-            <a:r>
-              <a:rPr lang="en-US" sz="2000">
-                <a:solidFill>
-                  <a:srgbClr val="FF0000"/>
-                </a:solidFill>
-              </a:rPr>
-              <a:t>You can take 2-3 more slides for each screenshot</a:t>
-            </a:r>
-            <a:endParaRPr lang="en-IN" sz="2000">
-              <a:solidFill>
-                <a:srgbClr val="FF0000"/>
-              </a:solidFill>
-            </a:endParaRPr>
-          </a:p>
-        </p:txBody>
-      </p:sp>
       <p:pic>
         <p:nvPicPr>
           <p:cNvPr id="5" name="Picture 4">
@@ -13340,7 +13471,7 @@
         </p:blipFill>
         <p:spPr>
           <a:xfrm>
-            <a:off x="409144" y="1044263"/>
+            <a:off x="179364" y="816977"/>
             <a:ext cx="11603492" cy="5553606"/>
           </a:xfrm>
           <a:prstGeom prst="rect">
@@ -13652,60 +13783,6 @@
           </a:p>
         </p:txBody>
       </p:sp>
-      <p:sp>
-        <p:nvSpPr>
-          <p:cNvPr id="2" name="TextBox 1">
-            <a:extLst>
-              <a:ext uri="{FF2B5EF4-FFF2-40B4-BE49-F238E27FC236}">
-                <a16:creationId xmlns:a16="http://schemas.microsoft.com/office/drawing/2014/main" id="{9692D13D-6B69-03D8-BA22-587B943A2572}"/>
-              </a:ext>
-            </a:extLst>
-          </p:cNvPr>
-          <p:cNvSpPr txBox="1"/>
-          <p:nvPr/>
-        </p:nvSpPr>
-        <p:spPr>
-          <a:xfrm>
-            <a:off x="1335024" y="1865376"/>
-            <a:ext cx="6833922" cy="707886"/>
-          </a:xfrm>
-          <a:prstGeom prst="rect">
-            <a:avLst/>
-          </a:prstGeom>
-          <a:noFill/>
-        </p:spPr>
-        <p:txBody>
-          <a:bodyPr wrap="none" rtlCol="0">
-            <a:spAutoFit/>
-          </a:bodyPr>
-          <a:lstStyle/>
-          <a:p>
-            <a:r>
-              <a:rPr lang="en-US" sz="2000">
-                <a:solidFill>
-                  <a:srgbClr val="FF0000"/>
-                </a:solidFill>
-              </a:rPr>
-              <a:t>Please put IBM Bob output screenshots with 2-3 prompts. </a:t>
-            </a:r>
-          </a:p>
-          <a:p>
-            <a:r>
-              <a:rPr lang="en-US" sz="2000">
-                <a:solidFill>
-                  <a:srgbClr val="FF0000"/>
-                </a:solidFill>
-              </a:rPr>
-              <a:t>You can take 2-3 more slides for each screenshot</a:t>
-            </a:r>
-            <a:endParaRPr lang="en-IN" sz="2000">
-              <a:solidFill>
-                <a:srgbClr val="FF0000"/>
-              </a:solidFill>
-            </a:endParaRPr>
-          </a:p>
-        </p:txBody>
-      </p:sp>
       <p:pic>
         <p:nvPicPr>
           <p:cNvPr id="7" name="Picture 6">
@@ -13728,7 +13805,7 @@
         </p:blipFill>
         <p:spPr>
           <a:xfrm>
-            <a:off x="466728" y="845267"/>
+            <a:off x="467528" y="786982"/>
             <a:ext cx="9475439" cy="5752602"/>
           </a:xfrm>
           <a:prstGeom prst="rect">
@@ -14040,60 +14117,6 @@
           </a:p>
         </p:txBody>
       </p:sp>
-      <p:sp>
-        <p:nvSpPr>
-          <p:cNvPr id="2" name="TextBox 1">
-            <a:extLst>
-              <a:ext uri="{FF2B5EF4-FFF2-40B4-BE49-F238E27FC236}">
-                <a16:creationId xmlns:a16="http://schemas.microsoft.com/office/drawing/2014/main" id="{EB55001C-8880-8B09-8704-29D3F62E7A03}"/>
-              </a:ext>
-            </a:extLst>
-          </p:cNvPr>
-          <p:cNvSpPr txBox="1"/>
-          <p:nvPr/>
-        </p:nvSpPr>
-        <p:spPr>
-          <a:xfrm>
-            <a:off x="1335024" y="1865376"/>
-            <a:ext cx="6833922" cy="707886"/>
-          </a:xfrm>
-          <a:prstGeom prst="rect">
-            <a:avLst/>
-          </a:prstGeom>
-          <a:noFill/>
-        </p:spPr>
-        <p:txBody>
-          <a:bodyPr wrap="none" rtlCol="0">
-            <a:spAutoFit/>
-          </a:bodyPr>
-          <a:lstStyle/>
-          <a:p>
-            <a:r>
-              <a:rPr lang="en-US" sz="2000">
-                <a:solidFill>
-                  <a:srgbClr val="FF0000"/>
-                </a:solidFill>
-              </a:rPr>
-              <a:t>Please put IBM Bob output screenshots with 2-3 prompts. </a:t>
-            </a:r>
-          </a:p>
-          <a:p>
-            <a:r>
-              <a:rPr lang="en-US" sz="2000">
-                <a:solidFill>
-                  <a:srgbClr val="FF0000"/>
-                </a:solidFill>
-              </a:rPr>
-              <a:t>You can take 2-3 more slides for each screenshot</a:t>
-            </a:r>
-            <a:endParaRPr lang="en-IN" sz="2000">
-              <a:solidFill>
-                <a:srgbClr val="FF0000"/>
-              </a:solidFill>
-            </a:endParaRPr>
-          </a:p>
-        </p:txBody>
-      </p:sp>
       <p:pic>
         <p:nvPicPr>
           <p:cNvPr id="5" name="Picture 4">
@@ -14117,7 +14140,7 @@
         </p:blipFill>
         <p:spPr>
           <a:xfrm>
-            <a:off x="409144" y="709851"/>
+            <a:off x="409144" y="927680"/>
             <a:ext cx="9728958" cy="5631120"/>
           </a:xfrm>
           <a:prstGeom prst="rect">
@@ -14485,61 +14508,6 @@
           </a:bodyPr>
           <a:lstStyle/>
           <a:p>
-            <a:pPr marL="0" marR="0" lvl="0" indent="0" algn="l" rtl="0">
-              <a:lnSpc>
-                <a:spcPct val="162162"/>
-              </a:lnSpc>
-              <a:spcBef>
-                <a:spcPts val="0"/>
-              </a:spcBef>
-              <a:spcAft>
-                <a:spcPts val="0"/>
-              </a:spcAft>
-              <a:buClr>
-                <a:srgbClr val="2B3541"/>
-              </a:buClr>
-              <a:buSzPts val="1850"/>
-              <a:buFont typeface="Times New Roman"/>
-              <a:buNone/>
-            </a:pPr>
-            <a:r>
-              <a:rPr lang="en-US" sz="1850" b="0" i="0" u="none" strike="noStrike" cap="none" dirty="0">
-                <a:solidFill>
-                  <a:srgbClr val="2B3541"/>
-                </a:solidFill>
-                <a:latin typeface="Times New Roman"/>
-                <a:ea typeface="Times New Roman"/>
-                <a:cs typeface="Times New Roman"/>
-                <a:sym typeface="Times New Roman"/>
-              </a:rPr>
-              <a:t>· Please create public </a:t>
-            </a:r>
-            <a:r>
-              <a:rPr lang="en-US" sz="1850" b="0" i="0" u="none" strike="noStrike" cap="none" dirty="0" err="1">
-                <a:solidFill>
-                  <a:srgbClr val="2B3541"/>
-                </a:solidFill>
-                <a:latin typeface="Times New Roman"/>
-                <a:ea typeface="Times New Roman"/>
-                <a:cs typeface="Times New Roman"/>
-                <a:sym typeface="Times New Roman"/>
-              </a:rPr>
-              <a:t>github</a:t>
-            </a:r>
-            <a:r>
-              <a:rPr lang="en-US" sz="1850" b="0" i="0" u="none" strike="noStrike" cap="none" dirty="0">
-                <a:solidFill>
-                  <a:srgbClr val="2B3541"/>
-                </a:solidFill>
-                <a:latin typeface="Times New Roman"/>
-                <a:ea typeface="Times New Roman"/>
-                <a:cs typeface="Times New Roman"/>
-                <a:sym typeface="Times New Roman"/>
-              </a:rPr>
-              <a:t> repository (Enable Add README  button while creating repository) with format – </a:t>
-            </a:r>
-          </a:p>
-          <a:p>
             <a:pPr>
               <a:lnSpc>
                 <a:spcPct val="162162"/>
@@ -14549,18 +14517,6 @@
               </a:buClr>
               <a:buSzPts val="1850"/>
             </a:pPr>
-            <a:r>
-              <a:rPr lang="en-US" sz="1850" dirty="0">
-                <a:solidFill>
-                  <a:srgbClr val="2B3541"/>
-                </a:solidFill>
-                <a:latin typeface="Times New Roman"/>
-                <a:ea typeface="Times New Roman"/>
-                <a:cs typeface="Times New Roman"/>
-                <a:sym typeface="Times New Roman"/>
-              </a:rPr>
-              <a:t>Please test and Paste the working  </a:t>
-            </a:r>
             <a:r>
               <a:rPr lang="en-US" sz="1850" dirty="0" err="1">
                 <a:solidFill>
@@ -14598,321 +14554,7 @@
               </a:rPr>
               <a:t>https://github.com/naveencoding75/nutrition-agent</a:t>
             </a:r>
-            <a:endParaRPr lang="en-US" sz="1850" dirty="0">
-              <a:solidFill>
-                <a:srgbClr val="2B3541"/>
-              </a:solidFill>
-              <a:latin typeface="Times New Roman"/>
-              <a:ea typeface="Times New Roman"/>
-              <a:cs typeface="Times New Roman"/>
-              <a:sym typeface="Times New Roman"/>
-            </a:endParaRPr>
-          </a:p>
-          <a:p>
-            <a:pPr lvl="0">
-              <a:lnSpc>
-                <a:spcPct val="162162"/>
-              </a:lnSpc>
-              <a:buClr>
-                <a:srgbClr val="2B3541"/>
-              </a:buClr>
-              <a:buSzPts val="1850"/>
-            </a:pPr>
-            <a:r>
-              <a:rPr lang="en-US" sz="1850" b="1" dirty="0">
-                <a:solidFill>
-                  <a:srgbClr val="2B3541"/>
-                </a:solidFill>
-                <a:latin typeface="Times New Roman"/>
-                <a:ea typeface="Times New Roman"/>
-                <a:cs typeface="Times New Roman"/>
-                <a:sym typeface="Times New Roman"/>
-              </a:rPr>
-              <a:t>Make sure you have Uploaded following three files into your </a:t>
-            </a:r>
-            <a:r>
-              <a:rPr lang="en-US" sz="1850" b="1" dirty="0" err="1">
-                <a:solidFill>
-                  <a:srgbClr val="2B3541"/>
-                </a:solidFill>
-                <a:latin typeface="Times New Roman"/>
-                <a:ea typeface="Times New Roman"/>
-                <a:cs typeface="Times New Roman"/>
-                <a:sym typeface="Times New Roman"/>
-              </a:rPr>
-              <a:t>github</a:t>
-            </a:r>
-            <a:r>
-              <a:rPr lang="en-US" sz="1850" b="1" dirty="0">
-                <a:solidFill>
-                  <a:srgbClr val="2B3541"/>
-                </a:solidFill>
-                <a:latin typeface="Times New Roman"/>
-                <a:ea typeface="Times New Roman"/>
-                <a:cs typeface="Times New Roman"/>
-                <a:sym typeface="Times New Roman"/>
-              </a:rPr>
-              <a:t> repository  </a:t>
-            </a:r>
-            <a:br>
-              <a:rPr lang="en-US" sz="1850" dirty="0">
-                <a:solidFill>
-                  <a:srgbClr val="2B3541"/>
-                </a:solidFill>
-                <a:latin typeface="Times New Roman"/>
-                <a:ea typeface="Times New Roman"/>
-                <a:cs typeface="Times New Roman"/>
-                <a:sym typeface="Times New Roman"/>
-              </a:rPr>
-            </a:br>
-            <a:r>
-              <a:rPr lang="en-US" sz="1850" dirty="0">
-                <a:solidFill>
-                  <a:srgbClr val="2B3541"/>
-                </a:solidFill>
-                <a:latin typeface="Times New Roman"/>
-                <a:ea typeface="Times New Roman"/>
-                <a:cs typeface="Times New Roman"/>
-                <a:sym typeface="Times New Roman"/>
-              </a:rPr>
-              <a:t>1) All Agent relevant files of IBM Cloud , 2) yourproblemstatement.pdf file  3) your projectpresntation.pptx file 4)any other files </a:t>
-            </a:r>
-          </a:p>
-          <a:p>
-            <a:pPr marL="0" marR="0" lvl="0" indent="0" algn="l" rtl="0">
-              <a:lnSpc>
-                <a:spcPct val="162162"/>
-              </a:lnSpc>
-              <a:spcBef>
-                <a:spcPts val="0"/>
-              </a:spcBef>
-              <a:spcAft>
-                <a:spcPts val="0"/>
-              </a:spcAft>
-              <a:buClr>
-                <a:srgbClr val="2B3541"/>
-              </a:buClr>
-              <a:buSzPts val="1850"/>
-              <a:buFont typeface="Times New Roman"/>
-              <a:buNone/>
-            </a:pPr>
             <a:endParaRPr sz="1850" b="0" i="0" u="none" strike="noStrike" cap="none" dirty="0">
-              <a:solidFill>
-                <a:srgbClr val="000000"/>
-              </a:solidFill>
-              <a:latin typeface="Times New Roman"/>
-              <a:ea typeface="Times New Roman"/>
-              <a:cs typeface="Times New Roman"/>
-              <a:sym typeface="Times New Roman"/>
-            </a:endParaRPr>
-          </a:p>
-        </p:txBody>
-      </p:sp>
-      <p:sp>
-        <p:nvSpPr>
-          <p:cNvPr id="280" name="Google Shape;280;p18">
-            <a:extLst>
-              <a:ext uri="{FF2B5EF4-FFF2-40B4-BE49-F238E27FC236}">
-                <a16:creationId xmlns:a16="http://schemas.microsoft.com/office/drawing/2014/main" id="{E228982D-BF81-530A-CBA1-E897A3CA8EF7}"/>
-              </a:ext>
-            </a:extLst>
-          </p:cNvPr>
-          <p:cNvSpPr/>
-          <p:nvPr/>
-        </p:nvSpPr>
-        <p:spPr>
-          <a:xfrm>
-            <a:off x="1218724" y="3360216"/>
-            <a:ext cx="7468553" cy="766048"/>
-          </a:xfrm>
-          <a:prstGeom prst="rect">
-            <a:avLst/>
-          </a:prstGeom>
-          <a:noFill/>
-          <a:ln>
-            <a:noFill/>
-          </a:ln>
-        </p:spPr>
-        <p:txBody>
-          <a:bodyPr spcFirstLastPara="1" wrap="square" lIns="0" tIns="0" rIns="0" bIns="0" anchor="t" anchorCtr="0">
-            <a:noAutofit/>
-          </a:bodyPr>
-          <a:lstStyle/>
-          <a:p>
-            <a:pPr marL="0" marR="0" lvl="0" indent="0" algn="l" rtl="0">
-              <a:lnSpc>
-                <a:spcPct val="162162"/>
-              </a:lnSpc>
-              <a:spcBef>
-                <a:spcPts val="0"/>
-              </a:spcBef>
-              <a:spcAft>
-                <a:spcPts val="0"/>
-              </a:spcAft>
-              <a:buClr>
-                <a:srgbClr val="2B3541"/>
-              </a:buClr>
-              <a:buSzPts val="1850"/>
-              <a:buFont typeface="Times New Roman"/>
-              <a:buNone/>
-            </a:pPr>
-            <a:r>
-              <a:rPr lang="en-US" sz="1850" b="0" i="0" u="none" strike="noStrike" cap="none">
-                <a:solidFill>
-                  <a:srgbClr val="2B3541"/>
-                </a:solidFill>
-                <a:latin typeface="Times New Roman"/>
-                <a:ea typeface="Times New Roman"/>
-                <a:cs typeface="Times New Roman"/>
-                <a:sym typeface="Times New Roman"/>
-              </a:rPr>
-              <a:t>·</a:t>
-            </a:r>
-            <a:endParaRPr sz="1850" b="0" i="0" u="none" strike="noStrike" cap="none">
-              <a:solidFill>
-                <a:srgbClr val="000000"/>
-              </a:solidFill>
-              <a:latin typeface="Times New Roman"/>
-              <a:ea typeface="Times New Roman"/>
-              <a:cs typeface="Times New Roman"/>
-              <a:sym typeface="Times New Roman"/>
-            </a:endParaRPr>
-          </a:p>
-        </p:txBody>
-      </p:sp>
-      <p:sp>
-        <p:nvSpPr>
-          <p:cNvPr id="281" name="Google Shape;281;p18">
-            <a:extLst>
-              <a:ext uri="{FF2B5EF4-FFF2-40B4-BE49-F238E27FC236}">
-                <a16:creationId xmlns:a16="http://schemas.microsoft.com/office/drawing/2014/main" id="{7BC356B8-92F8-3187-D065-667AACF68E72}"/>
-              </a:ext>
-            </a:extLst>
-          </p:cNvPr>
-          <p:cNvSpPr/>
-          <p:nvPr/>
-        </p:nvSpPr>
-        <p:spPr>
-          <a:xfrm>
-            <a:off x="1218724" y="4395464"/>
-            <a:ext cx="7468553" cy="766048"/>
-          </a:xfrm>
-          <a:prstGeom prst="rect">
-            <a:avLst/>
-          </a:prstGeom>
-          <a:noFill/>
-          <a:ln>
-            <a:noFill/>
-          </a:ln>
-        </p:spPr>
-        <p:txBody>
-          <a:bodyPr spcFirstLastPara="1" wrap="square" lIns="0" tIns="0" rIns="0" bIns="0" anchor="t" anchorCtr="0">
-            <a:noAutofit/>
-          </a:bodyPr>
-          <a:lstStyle/>
-          <a:p>
-            <a:pPr marL="0" marR="0" lvl="0" indent="0" algn="l" rtl="0">
-              <a:lnSpc>
-                <a:spcPct val="162162"/>
-              </a:lnSpc>
-              <a:spcBef>
-                <a:spcPts val="0"/>
-              </a:spcBef>
-              <a:spcAft>
-                <a:spcPts val="0"/>
-              </a:spcAft>
-              <a:buClr>
-                <a:srgbClr val="2B3541"/>
-              </a:buClr>
-              <a:buSzPts val="1850"/>
-              <a:buFont typeface="Times New Roman"/>
-              <a:buNone/>
-            </a:pPr>
-            <a:r>
-              <a:rPr lang="en-US" sz="1850" b="0" i="0" u="none" strike="noStrike" cap="none">
-                <a:solidFill>
-                  <a:srgbClr val="2B3541"/>
-                </a:solidFill>
-                <a:latin typeface="Times New Roman"/>
-                <a:ea typeface="Times New Roman"/>
-                <a:cs typeface="Times New Roman"/>
-                <a:sym typeface="Times New Roman"/>
-              </a:rPr>
-              <a:t>·</a:t>
-            </a:r>
-            <a:endParaRPr sz="1850" b="0" i="0" u="none" strike="noStrike" cap="none">
-              <a:solidFill>
-                <a:srgbClr val="000000"/>
-              </a:solidFill>
-              <a:latin typeface="Times New Roman"/>
-              <a:ea typeface="Times New Roman"/>
-              <a:cs typeface="Times New Roman"/>
-              <a:sym typeface="Times New Roman"/>
-            </a:endParaRPr>
-          </a:p>
-        </p:txBody>
-      </p:sp>
-      <p:sp>
-        <p:nvSpPr>
-          <p:cNvPr id="282" name="Google Shape;282;p18">
-            <a:extLst>
-              <a:ext uri="{FF2B5EF4-FFF2-40B4-BE49-F238E27FC236}">
-                <a16:creationId xmlns:a16="http://schemas.microsoft.com/office/drawing/2014/main" id="{1558A011-60D6-B010-6117-1B9F7C786B2B}"/>
-              </a:ext>
-            </a:extLst>
-          </p:cNvPr>
-          <p:cNvSpPr/>
-          <p:nvPr/>
-        </p:nvSpPr>
-        <p:spPr>
-          <a:xfrm>
-            <a:off x="1218724" y="5430713"/>
-            <a:ext cx="7468553" cy="383024"/>
-          </a:xfrm>
-          <a:prstGeom prst="rect">
-            <a:avLst/>
-          </a:prstGeom>
-          <a:noFill/>
-          <a:ln>
-            <a:noFill/>
-          </a:ln>
-        </p:spPr>
-        <p:txBody>
-          <a:bodyPr spcFirstLastPara="1" wrap="square" lIns="0" tIns="0" rIns="0" bIns="0" anchor="t" anchorCtr="0">
-            <a:noAutofit/>
-          </a:bodyPr>
-          <a:lstStyle/>
-          <a:p>
-            <a:pPr marL="0" marR="0" lvl="0" indent="0" algn="l" rtl="0">
-              <a:lnSpc>
-                <a:spcPct val="162162"/>
-              </a:lnSpc>
-              <a:spcBef>
-                <a:spcPts val="0"/>
-              </a:spcBef>
-              <a:spcAft>
-                <a:spcPts val="0"/>
-              </a:spcAft>
-              <a:buClr>
-                <a:srgbClr val="2B3541"/>
-              </a:buClr>
-              <a:buSzPts val="1850"/>
-              <a:buFont typeface="Times New Roman"/>
-              <a:buNone/>
-            </a:pPr>
-            <a:r>
-              <a:rPr lang="en-US" sz="1850" b="0" i="0" u="none" strike="noStrike" cap="none">
-                <a:solidFill>
-                  <a:srgbClr val="2B3541"/>
-                </a:solidFill>
-                <a:latin typeface="Times New Roman"/>
-                <a:ea typeface="Times New Roman"/>
-                <a:cs typeface="Times New Roman"/>
-                <a:sym typeface="Times New Roman"/>
-              </a:rPr>
-              <a:t>·</a:t>
-            </a:r>
-            <a:endParaRPr sz="1850" b="0" i="0" u="none" strike="noStrike" cap="none">
               <a:solidFill>
                 <a:srgbClr val="000000"/>
               </a:solidFill>
@@ -15034,7 +14676,7 @@
         </p:nvSpPr>
         <p:spPr>
           <a:xfrm>
-            <a:off x="1218724" y="1221715"/>
+            <a:off x="1218724" y="1345224"/>
             <a:ext cx="9214580" cy="4277001"/>
           </a:xfrm>
           <a:prstGeom prst="rect">
@@ -15069,7 +14711,7 @@
               <a:buNone/>
             </a:pPr>
             <a:r>
-              <a:rPr lang="en-US" sz="1850" b="1" i="0" u="none" strike="noStrike" cap="none">
+              <a:rPr lang="en-US" sz="1850" b="1" i="0" u="none" strike="noStrike" cap="none" dirty="0">
                 <a:solidFill>
                   <a:srgbClr val="2B3541"/>
                 </a:solidFill>
@@ -15078,7 +14720,7 @@
                 <a:cs typeface="Times New Roman"/>
                 <a:sym typeface="Times New Roman"/>
               </a:rPr>
-              <a:t>1.Integration with Wearables &amp; Health Devices – </a:t>
+              <a:t>1. Integration with Wearables &amp; Health Devices – </a:t>
             </a:r>
           </a:p>
           <a:p>
@@ -15100,7 +14742,7 @@
               <a:buNone/>
             </a:pPr>
             <a:r>
-              <a:rPr lang="en-US" sz="1850" b="0" i="0" u="none" strike="noStrike" cap="none">
+              <a:rPr lang="en-US" sz="1850" b="0" i="0" u="none" strike="noStrike" cap="none" dirty="0">
                 <a:solidFill>
                   <a:srgbClr val="2B3541"/>
                 </a:solidFill>
@@ -15131,7 +14773,7 @@
               <a:buNone/>
             </a:pPr>
             <a:r>
-              <a:rPr lang="en-US" sz="1850" b="1">
+              <a:rPr lang="en-US" sz="1850" b="1" dirty="0">
                 <a:solidFill>
                   <a:srgbClr val="2B3541"/>
                 </a:solidFill>
@@ -15140,10 +14782,10 @@
                 <a:cs typeface="Times New Roman"/>
                 <a:sym typeface="Times New Roman"/>
               </a:rPr>
-              <a:t>2.</a:t>
+              <a:t>2. </a:t>
             </a:r>
             <a:r>
-              <a:rPr lang="en-US" sz="1850" b="1" i="0" u="none" strike="noStrike" cap="none">
+              <a:rPr lang="en-US" sz="1850" b="1" i="0" u="none" strike="noStrike" cap="none" dirty="0">
                 <a:solidFill>
                   <a:srgbClr val="2B3541"/>
                 </a:solidFill>
@@ -15155,7 +14797,7 @@
               <a:t>AI-Powered Voice Assistant &amp; Multilingual Support </a:t>
             </a:r>
             <a:r>
-              <a:rPr lang="en-US" sz="1850" b="0" i="0" u="none" strike="noStrike" cap="none">
+              <a:rPr lang="en-US" sz="1850" b="0" i="0" u="none" strike="noStrike" cap="none" dirty="0">
                 <a:solidFill>
                   <a:srgbClr val="2B3541"/>
                 </a:solidFill>
@@ -15186,7 +14828,7 @@
               <a:buNone/>
             </a:pPr>
             <a:r>
-              <a:rPr lang="en-US" sz="1850" b="0" i="0" u="none" strike="noStrike" cap="none">
+              <a:rPr lang="en-US" sz="1850" b="0" i="0" u="none" strike="noStrike" cap="none" dirty="0">
                 <a:solidFill>
                   <a:srgbClr val="2B3541"/>
                 </a:solidFill>
@@ -15197,7 +14839,7 @@
               </a:rPr>
               <a:t>Enhancing the system with a voice-enabled assistant and support for multiple languages will improve accessibility. Users can interact naturally in their preferred language, making the solution more inclusive and suitable for diverse populations, especially in regions with varied linguistic backgrounds.</a:t>
             </a:r>
-            <a:endParaRPr sz="1850" b="0" i="0" u="none" strike="noStrike" cap="none">
+            <a:endParaRPr sz="1850" b="0" i="0" u="none" strike="noStrike" cap="none" dirty="0">
               <a:solidFill>
                 <a:srgbClr val="000000"/>
               </a:solidFill>
@@ -15257,19 +14899,7 @@
               <a:buFont typeface="Times New Roman"/>
               <a:buNone/>
             </a:pPr>
-            <a:r>
-              <a:rPr lang="en-US" sz="1850" b="0" i="0" u="none" strike="noStrike" cap="none">
-                <a:solidFill>
-                  <a:srgbClr val="2B3541"/>
-                </a:solidFill>
-                <a:latin typeface="Times New Roman"/>
-                <a:ea typeface="Times New Roman"/>
-                <a:cs typeface="Times New Roman"/>
-                <a:sym typeface="Times New Roman"/>
-              </a:rPr>
-              <a:t>·</a:t>
-            </a:r>
-            <a:endParaRPr sz="1850" b="0" i="0" u="none" strike="noStrike" cap="none">
+            <a:endParaRPr sz="1850" b="0" i="0" u="none" strike="noStrike" cap="none" dirty="0">
               <a:solidFill>
                 <a:srgbClr val="000000"/>
               </a:solidFill>
@@ -15295,7 +14925,7 @@
         </p:nvSpPr>
         <p:spPr>
           <a:xfrm>
-            <a:off x="1218724" y="4395464"/>
+            <a:off x="950710" y="4314982"/>
             <a:ext cx="7468553" cy="766048"/>
           </a:xfrm>
           <a:prstGeom prst="rect">
@@ -15329,19 +14959,7 @@
               <a:buFont typeface="Times New Roman"/>
               <a:buNone/>
             </a:pPr>
-            <a:r>
-              <a:rPr lang="en-US" sz="1850" b="0" i="0" u="none" strike="noStrike" cap="none">
-                <a:solidFill>
-                  <a:srgbClr val="2B3541"/>
-                </a:solidFill>
-                <a:latin typeface="Times New Roman"/>
-                <a:ea typeface="Times New Roman"/>
-                <a:cs typeface="Times New Roman"/>
-                <a:sym typeface="Times New Roman"/>
-              </a:rPr>
-              <a:t>·</a:t>
-            </a:r>
-            <a:endParaRPr sz="1850" b="0" i="0" u="none" strike="noStrike" cap="none">
+            <a:endParaRPr sz="1850" b="0" i="0" u="none" strike="noStrike" cap="none" dirty="0">
               <a:solidFill>
                 <a:srgbClr val="000000"/>
               </a:solidFill>
@@ -15401,19 +15019,7 @@
               <a:buFont typeface="Times New Roman"/>
               <a:buNone/>
             </a:pPr>
-            <a:r>
-              <a:rPr lang="en-US" sz="1850" b="0" i="0" u="none" strike="noStrike" cap="none">
-                <a:solidFill>
-                  <a:srgbClr val="2B3541"/>
-                </a:solidFill>
-                <a:latin typeface="Times New Roman"/>
-                <a:ea typeface="Times New Roman"/>
-                <a:cs typeface="Times New Roman"/>
-                <a:sym typeface="Times New Roman"/>
-              </a:rPr>
-              <a:t>·</a:t>
-            </a:r>
-            <a:endParaRPr sz="1850" b="0" i="0" u="none" strike="noStrike" cap="none">
+            <a:endParaRPr sz="1850" b="0" i="0" u="none" strike="noStrike" cap="none" dirty="0">
               <a:solidFill>
                 <a:srgbClr val="000000"/>
               </a:solidFill>
@@ -15529,12 +15135,8 @@
           <a:lstStyle/>
           <a:p>
             <a:r>
-              <a:rPr lang="en-US" sz="2400" b="1" dirty="0"/>
-              <a:t>Please  add your </a:t>
-            </a:r>
-            <a:r>
               <a:rPr lang="en-US" sz="2400" b="1" dirty="0" err="1"/>
-              <a:t>credly</a:t>
+              <a:t>Credly</a:t>
             </a:r>
             <a:r>
               <a:rPr lang="en-US" sz="2400" b="1" dirty="0"/>
@@ -15695,8 +15297,8 @@
           <a:lstStyle/>
           <a:p>
             <a:r>
-              <a:rPr lang="en-US" sz="2000" b="1"/>
-              <a:t>Add your IBM BOB Certificate</a:t>
+              <a:rPr lang="en-US" sz="2000" b="1" dirty="0"/>
+              <a:t>IBM BOB Certificate</a:t>
             </a:r>
           </a:p>
         </p:txBody>
@@ -16702,91 +16304,6 @@
           </a:p>
         </p:txBody>
       </p:sp>
-      <p:sp>
-        <p:nvSpPr>
-          <p:cNvPr id="3" name="TextBox 2">
-            <a:extLst>
-              <a:ext uri="{FF2B5EF4-FFF2-40B4-BE49-F238E27FC236}">
-                <a16:creationId xmlns:a16="http://schemas.microsoft.com/office/drawing/2014/main" id="{B0B023FA-CFEB-ACE9-8425-7E72E307CDC5}"/>
-              </a:ext>
-            </a:extLst>
-          </p:cNvPr>
-          <p:cNvSpPr txBox="1"/>
-          <p:nvPr/>
-        </p:nvSpPr>
-        <p:spPr>
-          <a:xfrm>
-            <a:off x="1211005" y="5210667"/>
-            <a:ext cx="6456743" cy="1631216"/>
-          </a:xfrm>
-          <a:prstGeom prst="rect">
-            <a:avLst/>
-          </a:prstGeom>
-          <a:noFill/>
-        </p:spPr>
-        <p:txBody>
-          <a:bodyPr rot="0" spcFirstLastPara="0" vertOverflow="overflow" horzOverflow="overflow" vert="horz" wrap="square" lIns="91440" tIns="45720" rIns="91440" bIns="45720" numCol="1" spcCol="0" rtlCol="0" fromWordArt="0" anchor="t" anchorCtr="0" forceAA="0" compatLnSpc="1">
-            <a:prstTxWarp prst="textNoShape">
-              <a:avLst/>
-            </a:prstTxWarp>
-            <a:spAutoFit/>
-          </a:bodyPr>
-          <a:lstStyle/>
-          <a:p>
-            <a:r>
-              <a:rPr lang="en-US" sz="2000">
-                <a:solidFill>
-                  <a:srgbClr val="FF0000"/>
-                </a:solidFill>
-              </a:rPr>
-              <a:t>Recommended font style and size:</a:t>
-            </a:r>
-            <a:br>
-              <a:rPr lang="en-US" sz="2000">
-                <a:solidFill>
-                  <a:srgbClr val="FF0000"/>
-                </a:solidFill>
-              </a:rPr>
-            </a:br>
-            <a:br>
-              <a:rPr lang="en-US" sz="2000"/>
-            </a:br>
-            <a:r>
-              <a:rPr lang="en-US" sz="2000">
-                <a:solidFill>
-                  <a:srgbClr val="FF0000"/>
-                </a:solidFill>
-              </a:rPr>
-              <a:t>Font Style: Arial</a:t>
-            </a:r>
-            <a:br>
-              <a:rPr lang="en-US" sz="2000">
-                <a:solidFill>
-                  <a:srgbClr val="FF0000"/>
-                </a:solidFill>
-              </a:rPr>
-            </a:br>
-            <a:r>
-              <a:rPr lang="en-US" sz="2000">
-                <a:solidFill>
-                  <a:srgbClr val="FF0000"/>
-                </a:solidFill>
-              </a:rPr>
-              <a:t>Font Size (Heading): 28</a:t>
-            </a:r>
-          </a:p>
-          <a:p>
-            <a:r>
-              <a:rPr lang="en-US" sz="2000">
-                <a:solidFill>
-                  <a:srgbClr val="FF0000"/>
-                </a:solidFill>
-              </a:rPr>
-              <a:t>Font Size (Content): 20</a:t>
-            </a:r>
-          </a:p>
-        </p:txBody>
-      </p:sp>
       <p:pic>
         <p:nvPicPr>
           <p:cNvPr id="5" name="Picture 4">
